--- a/curso_es/pptx/S41.pptx
+++ b/curso_es/pptx/S41.pptx
@@ -4128,7 +4128,7 @@
                 </a:solidFill>
                 <a:latin typeface="Nunito Sans"/>
               </a:rPr>
-              <a:t>Aitor: «Fumar no es tan malo. Mi abuelo fumó toda la vida y vivió 95 años».</a:t>
+              <a:t>Un chico: «Fumar no es tan malo. Mi abuelo fumó toda la vida y vivió 95 años».</a:t>
             </a:r>
           </a:p>
         </p:txBody>
@@ -4437,7 +4437,7 @@
                 </a:solidFill>
                 <a:latin typeface="Nunito Sans"/>
               </a:rPr>
-              <a:t>El entrenador del equipo del barrio: «Kevin marca de media un gol por partido». Han jugado 10 partidos. (Ejemplo inventado.)</a:t>
+              <a:t>El entrenador del equipo del barrio: «Un chico marca de media un gol por partido». Han jugado 10 partidos. (Ejemplo inventado.)</a:t>
             </a:r>
           </a:p>
         </p:txBody>
@@ -5314,7 +5314,7 @@
                 </a:solidFill>
                 <a:latin typeface="Nunito Sans"/>
               </a:rPr>
-              <a:t>Anuncio (inventado): «Con nuestro casco, nunca te harás una herida en la cabeza». Iker se cayó con ese casco puesto y se hizo una herida.</a:t>
+              <a:t>Anuncio (inventado): «Con nuestro casco, nunca te harás una herida en la cabeza». Un chico se cayó con ese casco puesto y se hizo una herida.</a:t>
             </a:r>
           </a:p>
         </p:txBody>
@@ -5455,7 +5455,7 @@
                 </a:solidFill>
                 <a:latin typeface="Nunito Sans"/>
               </a:rPr>
-              <a:t>Si lo de Iker es verdad, el anuncio es falso, aunque el casco proteja mucho.</a:t>
+              <a:t>Si lo del chico es verdad, el anuncio es falso, aunque el casco proteja mucho.</a:t>
             </a:r>
           </a:p>
           <a:p>
@@ -6637,7 +6637,7 @@
                 </a:solidFill>
                 <a:latin typeface="Nunito Sans"/>
               </a:rPr>
-              <a:t>Hoy un experimento como el de Milgram no estaría ______.  (sesión 29)</a:t>
+              <a:t>Hoy un experimento como el de las descargas no estaría ______.  (sesión 29)</a:t>
             </a:r>
           </a:p>
         </p:txBody>
@@ -6875,7 +6875,7 @@
                 </a:solidFill>
                 <a:latin typeface="Nunito Sans"/>
               </a:rPr>
-              <a:t>Hoy un experimento como el de Milgram no estaría </a:t>
+              <a:t>Hoy un experimento como el de las descargas no estaría </a:t>
             </a:r>
             <a:r>
               <a:rPr sz="2600" b="1">
@@ -7632,7 +7632,7 @@
                 </a:solidFill>
                 <a:latin typeface="Fredoka"/>
               </a:rPr>
-              <a:t>Dos clases con media 5 (ejemplo inventado)</a:t>
+              <a:t>Dos institutos con media 5 (ejemplo inventado)</a:t>
             </a:r>
           </a:p>
         </p:txBody>
@@ -7673,7 +7673,7 @@
                           </a:solidFill>
                           <a:latin typeface="Fredoka"/>
                         </a:rPr>
-                        <a:t>Clase</a:t>
+                        <a:t>Instituto</a:t>
                       </a:r>
                     </a:p>
                   </a:txBody>
@@ -7741,7 +7741,7 @@
                           </a:solidFill>
                           <a:latin typeface="Nunito Sans"/>
                         </a:rPr>
-                        <a:t>2.º A</a:t>
+                        <a:t>Instituto A</a:t>
                       </a:r>
                     </a:p>
                   </a:txBody>
@@ -7809,7 +7809,7 @@
                           </a:solidFill>
                           <a:latin typeface="Nunito Sans"/>
                         </a:rPr>
-                        <a:t>2.º B</a:t>
+                        <a:t>Instituto B</a:t>
                       </a:r>
                     </a:p>
                   </a:txBody>
@@ -7921,7 +7921,7 @@
                           </a:solidFill>
                           <a:latin typeface="Nunito Sans"/>
                         </a:rPr>
-                        <a:t>Misma media, clases muy distintas</a:t>
+                        <a:t>Misma media, institutos muy distintos</a:t>
                       </a:r>
                     </a:p>
                   </a:txBody>
